--- a/presentation.pptx
+++ b/presentation.pptx
@@ -4713,7 +4713,7 @@
               </a:defRPr>
             </a:pPr>
             <a:r>
-              <a:t>✦  Unmatched Performance: Runs in &amp;le; 12 seconds over the 100k candidate pool.</a:t>
+              <a:t>✦  Unmatched Performance: Runs in &lt;= 12 seconds over the 100k candidate pool.</a:t>
             </a:r>
           </a:p>
           <a:p>
